--- a/site/clases/parte-5-ingenieria-de-datos/209-pipelines-con-prefect-o-dagster/clase-209-pipelines-con-prefect-o-dagster-presentacion.pptx
+++ b/site/clases/parte-5-ingenieria-de-datos/209-pipelines-con-prefect-o-dagster/clase-209-pipelines-con-prefect-o-dagster-presentacion.pptx
@@ -3272,7 +3272,7 @@
                 </a:solidFill>
                 <a:latin typeface="Segoe UI"/>
               </a:rPr>
-              <a:t>Parte: 5 — Ingeniería de Datos · Fuente: Prefect 3 docs + Dagster docs + Reis &amp; Housley cap. 8.  Duración estimada: 75 min.</a:t>
+              <a:t>Parte: 5 — Ingeniería de Datos · Fuente: Prefect 3 docs + Dagster docs + Reis &amp; Housley cap. 8.  Duración estimada: 75 min. · Nivel: Intermedio-Avanzado</a:t>
             </a:r>
           </a:p>
         </p:txBody>
@@ -3581,7 +3581,7 @@
                 </a:solidFill>
                 <a:latin typeface="Segoe UI"/>
               </a:rPr>
-              <a:t>Parte: 5 — Ingeniería de Datos · Fuente: Prefect 3 docs + Dagster docs + Reis &amp; Housley cap. 8.  Duración estimada: 75 min.</a:t>
+              <a:t>Parte: 5 — Ingeniería de Datos · Fuente: Prefect 3 docs + Dagster docs + Reis &amp; Housley cap. 8.  Duración estimada: 75 min. · Nivel: Intermedio-Avanzado</a:t>
             </a:r>
           </a:p>
         </p:txBody>
